--- a/data/employees/EMP093/AST-EMP093-01.pptx
+++ b/data/employees/EMP093/AST-EMP093-01.pptx
@@ -9,6 +9,7 @@
     <p:sldId id="257" r:id="rId8"/>
     <p:sldId id="258" r:id="rId9"/>
     <p:sldId id="259" r:id="rId10"/>
+    <p:sldId id="260" r:id="rId11"/>
   </p:sldIdLst>
   <p:sldSz cx="9144000" cy="6858000" type="screen4x3"/>
   <p:notesSz cx="6858000" cy="9144000"/>
@@ -3098,42 +3099,55 @@
             <a:spLocks noGrp="1"/>
           </p:cNvSpPr>
           <p:nvPr>
-            <p:ph type="ctrTitle"/>
-          </p:nvPr>
-        </p:nvSpPr>
-        <p:spPr/>
-        <p:txBody>
-          <a:bodyPr/>
-          <a:lstStyle/>
-          <a:p>
-            <a:r>
-              <a:t>Project update deck - EMP093</a:t>
-            </a:r>
-          </a:p>
-        </p:txBody>
-      </p:sp>
-      <p:sp>
-        <p:nvSpPr>
-          <p:cNvPr id="3" name="Subtitle 2"/>
-          <p:cNvSpPr>
-            <a:spLocks noGrp="1"/>
-          </p:cNvSpPr>
-          <p:nvPr>
-            <p:ph type="subTitle" idx="1"/>
-          </p:nvPr>
-        </p:nvSpPr>
-        <p:spPr/>
-        <p:txBody>
-          <a:bodyPr/>
-          <a:lstStyle/>
-          <a:p>
-            <a:r>
-              <a:t>Taylor Miller | Senior Engineer | Procurement</a:t>
-            </a:r>
-          </a:p>
-          <a:p>
-            <a:r>
-              <a:t>Prepared: 2025-04-05</a:t>
+            <p:ph type="title"/>
+          </p:nvPr>
+        </p:nvSpPr>
+        <p:spPr/>
+        <p:txBody>
+          <a:bodyPr/>
+          <a:lstStyle/>
+          <a:p>
+            <a:r>
+              <a:t>Ast Emp093 01 - EMP093</a:t>
+            </a:r>
+          </a:p>
+        </p:txBody>
+      </p:sp>
+      <p:sp>
+        <p:nvSpPr>
+          <p:cNvPr id="3" name="Content Placeholder 2"/>
+          <p:cNvSpPr>
+            <a:spLocks noGrp="1"/>
+          </p:cNvSpPr>
+          <p:nvPr>
+            <p:ph idx="1"/>
+          </p:nvPr>
+        </p:nvSpPr>
+        <p:spPr/>
+        <p:txBody>
+          <a:bodyPr/>
+          <a:lstStyle/>
+          <a:p>
+            <a:r>
+              <a:t>Slide 1: Executive Summary</a:t>
+            </a:r>
+          </a:p>
+          <a:p>
+            <a:pPr lvl="1"/>
+            <a:r>
+              <a:t>Section 1: Knowledge transfer and onboarding. EMP093 contributes to ast emp093 01 through recurring collaboration, clear ownership boundaries, and measurable outcomes. The team captures decisions, open issues, and handoffs so that knowledge remains discoverable for future programs.</a:t>
+            </a:r>
+          </a:p>
+          <a:p>
+            <a:pPr lvl="1"/>
+            <a:r>
+              <a:t>Section 2: Department KPI performance. EMP093 contributes to ast emp093 01 through recurring collaboration, clear ownership boundaries, and measurable outcomes. The team captures decisions, open issues, and handoffs so that knowledge remains discoverable for future programs.</a:t>
+            </a:r>
+          </a:p>
+          <a:p>
+            <a:pPr lvl="1"/>
+            <a:r>
+              <a:t>Section 3: Automation backlog refinement. EMP093 contributes to ast emp093 01 through recurring collaboration, clear ownership boundaries, and measurable outcomes. The team captures decisions, open issues, and handoffs so that knowledge remains discoverable for future programs.</a:t>
             </a:r>
           </a:p>
         </p:txBody>
@@ -3172,7 +3186,7 @@
           <a:lstStyle/>
           <a:p>
             <a:r>
-              <a:t>Vendor Scorecard Q2</a:t>
+              <a:t>Ast Emp093 01 - EMP093</a:t>
             </a:r>
           </a:p>
         </p:txBody>
@@ -3193,17 +3207,25 @@
           <a:lstStyle/>
           <a:p>
             <a:r>
-              <a:t>Overview of Vendor Scorecard Q2 for Procurement department.</a:t>
-            </a:r>
-          </a:p>
-          <a:p>
-            <a:r>
-              <a:t>Responsible: Taylor Miller (Senior Engineer)</a:t>
-            </a:r>
-          </a:p>
-          <a:p>
-            <a:r>
-              <a:t>Location: Austin | Skills: Kusto, TypeScript, MLOps, Fabric</a:t>
+              <a:t>Slide 2: Executive Summary</a:t>
+            </a:r>
+          </a:p>
+          <a:p>
+            <a:pPr lvl="1"/>
+            <a:r>
+              <a:t>Section 1: Operational risk review. EMP093 contributes to ast emp093 01 through recurring collaboration, clear ownership boundaries, and measurable outcomes. The team captures decisions, open issues, and handoffs so that knowledge remains discoverable for future programs.</a:t>
+            </a:r>
+          </a:p>
+          <a:p>
+            <a:pPr lvl="1"/>
+            <a:r>
+              <a:t>Section 2: Knowledge transfer and onboarding. EMP093 contributes to ast emp093 01 through recurring collaboration, clear ownership boundaries, and measurable outcomes. The team captures decisions, open issues, and handoffs so that knowledge remains discoverable for future programs.</a:t>
+            </a:r>
+          </a:p>
+          <a:p>
+            <a:pPr lvl="1"/>
+            <a:r>
+              <a:t>Section 3: Automation backlog refinement. EMP093 contributes to ast emp093 01 through recurring collaboration, clear ownership boundaries, and measurable outcomes. The team captures decisions, open issues, and handoffs so that knowledge remains discoverable for future programs.</a:t>
             </a:r>
           </a:p>
         </p:txBody>
@@ -3242,7 +3264,7 @@
           <a:lstStyle/>
           <a:p>
             <a:r>
-              <a:t>Contract Renewals Pipeline</a:t>
+              <a:t>Ast Emp093 01 - EMP093</a:t>
             </a:r>
           </a:p>
         </p:txBody>
@@ -3263,17 +3285,25 @@
           <a:lstStyle/>
           <a:p>
             <a:r>
-              <a:t>Overview of Contract Renewals Pipeline for Procurement department.</a:t>
-            </a:r>
-          </a:p>
-          <a:p>
-            <a:r>
-              <a:t>Responsible: Taylor Miller (Senior Engineer)</a:t>
-            </a:r>
-          </a:p>
-          <a:p>
-            <a:r>
-              <a:t>Location: Austin | Skills: Kusto, TypeScript, MLOps, Fabric</a:t>
+              <a:t>Slide 3: Executive Summary</a:t>
+            </a:r>
+          </a:p>
+          <a:p>
+            <a:pPr lvl="1"/>
+            <a:r>
+              <a:t>Section 1: Data quality remediation. EMP093 contributes to ast emp093 01 through recurring collaboration, clear ownership boundaries, and measurable outcomes. The team captures decisions, open issues, and handoffs so that knowledge remains discoverable for future programs.</a:t>
+            </a:r>
+          </a:p>
+          <a:p>
+            <a:pPr lvl="1"/>
+            <a:r>
+              <a:t>Section 2: Fabric semantic model planning. EMP093 contributes to ast emp093 01 through recurring collaboration, clear ownership boundaries, and measurable outcomes. The team captures decisions, open issues, and handoffs so that knowledge remains discoverable for future programs.</a:t>
+            </a:r>
+          </a:p>
+          <a:p>
+            <a:pPr lvl="1"/>
+            <a:r>
+              <a:t>Section 3: Department KPI performance. EMP093 contributes to ast emp093 01 through recurring collaboration, clear ownership boundaries, and measurable outcomes. The team captures decisions, open issues, and handoffs so that knowledge remains discoverable for future programs.</a:t>
             </a:r>
           </a:p>
         </p:txBody>
@@ -3312,7 +3342,7 @@
           <a:lstStyle/>
           <a:p>
             <a:r>
-              <a:t>Category Spend Analysis</a:t>
+              <a:t>Ast Emp093 01 - EMP093</a:t>
             </a:r>
           </a:p>
         </p:txBody>
@@ -3333,17 +3363,103 @@
           <a:lstStyle/>
           <a:p>
             <a:r>
-              <a:t>Overview of Category Spend Analysis for Procurement department.</a:t>
-            </a:r>
-          </a:p>
-          <a:p>
-            <a:r>
-              <a:t>Responsible: Taylor Miller (Senior Engineer)</a:t>
-            </a:r>
-          </a:p>
-          <a:p>
-            <a:r>
-              <a:t>Location: Austin | Skills: Kusto, TypeScript, MLOps, Fabric</a:t>
+              <a:t>Slide 4: Executive Summary</a:t>
+            </a:r>
+          </a:p>
+          <a:p>
+            <a:pPr lvl="1"/>
+            <a:r>
+              <a:t>Section 1: Knowledge transfer and onboarding. EMP093 contributes to ast emp093 01 through recurring collaboration, clear ownership boundaries, and measurable outcomes. The team captures decisions, open issues, and handoffs so that knowledge remains discoverable for future programs.</a:t>
+            </a:r>
+          </a:p>
+          <a:p>
+            <a:pPr lvl="1"/>
+            <a:r>
+              <a:t>Section 2: Customer escalation analysis. EMP093 contributes to ast emp093 01 through recurring collaboration, clear ownership boundaries, and measurable outcomes. The team captures decisions, open issues, and handoffs so that knowledge remains discoverable for future programs.</a:t>
+            </a:r>
+          </a:p>
+          <a:p>
+            <a:pPr lvl="1"/>
+            <a:r>
+              <a:t>Section 3: Automation backlog refinement. EMP093 contributes to ast emp093 01 through recurring collaboration, clear ownership boundaries, and measurable outcomes. The team captures decisions, open issues, and handoffs so that knowledge remains discoverable for future programs.</a:t>
+            </a:r>
+          </a:p>
+        </p:txBody>
+      </p:sp>
+    </p:spTree>
+  </p:cSld>
+  <p:clrMapOvr>
+    <a:masterClrMapping/>
+  </p:clrMapOvr>
+</p:sld>
+</file>
+
+<file path=ppt/slides/slide5.xml><?xml version="1.0" encoding="utf-8"?>
+<p:sld xmlns:a="http://schemas.openxmlformats.org/drawingml/2006/main" xmlns:p="http://schemas.openxmlformats.org/presentationml/2006/main" xmlns:r="http://schemas.openxmlformats.org/officeDocument/2006/relationships">
+  <p:cSld>
+    <p:spTree>
+      <p:nvGrpSpPr>
+        <p:cNvPr id="1" name=""/>
+        <p:cNvGrpSpPr/>
+        <p:nvPr/>
+      </p:nvGrpSpPr>
+      <p:grpSpPr/>
+      <p:sp>
+        <p:nvSpPr>
+          <p:cNvPr id="2" name="Title 1"/>
+          <p:cNvSpPr>
+            <a:spLocks noGrp="1"/>
+          </p:cNvSpPr>
+          <p:nvPr>
+            <p:ph type="title"/>
+          </p:nvPr>
+        </p:nvSpPr>
+        <p:spPr/>
+        <p:txBody>
+          <a:bodyPr/>
+          <a:lstStyle/>
+          <a:p>
+            <a:r>
+              <a:t>Ast Emp093 01 - EMP093</a:t>
+            </a:r>
+          </a:p>
+        </p:txBody>
+      </p:sp>
+      <p:sp>
+        <p:nvSpPr>
+          <p:cNvPr id="3" name="Content Placeholder 2"/>
+          <p:cNvSpPr>
+            <a:spLocks noGrp="1"/>
+          </p:cNvSpPr>
+          <p:nvPr>
+            <p:ph idx="1"/>
+          </p:nvPr>
+        </p:nvSpPr>
+        <p:spPr/>
+        <p:txBody>
+          <a:bodyPr/>
+          <a:lstStyle/>
+          <a:p>
+            <a:r>
+              <a:t>Slide 5: Executive Summary</a:t>
+            </a:r>
+          </a:p>
+          <a:p>
+            <a:pPr lvl="1"/>
+            <a:r>
+              <a:t>Section 1: Quarterly delivery milestones. EMP093 contributes to ast emp093 01 through recurring collaboration, clear ownership boundaries, and measurable outcomes. The team captures decisions, open issues, and handoffs so that knowledge remains discoverable for future programs.</a:t>
+            </a:r>
+          </a:p>
+          <a:p>
+            <a:pPr lvl="1"/>
+            <a:r>
+              <a:t>Section 2: Fabric semantic model planning. EMP093 contributes to ast emp093 01 through recurring collaboration, clear ownership boundaries, and measurable outcomes. The team captures decisions, open issues, and handoffs so that knowledge remains discoverable for future programs.</a:t>
+            </a:r>
+          </a:p>
+          <a:p>
+            <a:pPr lvl="1"/>
+            <a:r>
+              <a:t>Section 3: Quarterly delivery milestones. EMP093 contributes to ast emp093 01 through recurring collaboration, clear ownership boundaries, and measurable outcomes. The team captures decisions, open issues, and handoffs so that knowledge remains discoverable for future programs.</a:t>
             </a:r>
           </a:p>
         </p:txBody>
